--- a/07/ppt/07-1_관계형_데이터베이스의_기초_v1.pptx
+++ b/07/ppt/07-1_관계형_데이터베이스의_기초_v1.pptx
@@ -2847,20 +2847,44 @@
           </a:p>
         </p:txBody>
       </p:sp>
-      <p:sp>
-        <p:nvSpPr>
-          <p:cNvPr id="13" name="Shape 11"/>
-          <p:cNvSpPr/>
-          <p:nvPr/>
-        </p:nvSpPr>
-        <p:spPr>
-          <a:xfrm>
-            <a:off x="530352" y="3108960"/>
-            <a:ext cx="11128248" cy="914400"/>
+      <p:pic>
+        <p:nvPicPr>
+          <p:cNvPr id="13" name="Image 0" descr="/home/claude/w5/교과서_배포/assets/img/07-1-01-points-to.png">    </p:cNvPr>
+          <p:cNvPicPr>
+            <a:picLocks noChangeAspect="1"/>
+          </p:cNvPicPr>
+          <p:nvPr/>
+        </p:nvPicPr>
+        <p:blipFill>
+          <a:blip r:embed="rId1"/>
+          <a:stretch>
+            <a:fillRect/>
+          </a:stretch>
+        </p:blipFill>
+        <p:spPr>
+          <a:xfrm>
+            <a:off x="1216152" y="3108960"/>
+            <a:ext cx="4389120" cy="2468880"/>
+          </a:xfrm>
+          <a:prstGeom prst="rect">
+            <a:avLst/>
+          </a:prstGeom>
+        </p:spPr>
+      </p:pic>
+      <p:sp>
+        <p:nvSpPr>
+          <p:cNvPr id="14" name="Shape 11"/>
+          <p:cNvSpPr/>
+          <p:nvPr/>
+        </p:nvSpPr>
+        <p:spPr>
+          <a:xfrm>
+            <a:off x="6309360" y="3108960"/>
+            <a:ext cx="5349240" cy="868680"/>
           </a:xfrm>
           <a:prstGeom prst="roundRect">
             <a:avLst>
-              <a:gd name="adj" fmla="val 5000"/>
+              <a:gd name="adj" fmla="val 5263"/>
             </a:avLst>
           </a:prstGeom>
           <a:solidFill>
@@ -2871,14 +2895,14 @@
       </p:sp>
       <p:sp>
         <p:nvSpPr>
-          <p:cNvPr id="14" name="Text 12"/>
-          <p:cNvSpPr/>
-          <p:nvPr/>
-        </p:nvSpPr>
-        <p:spPr>
-          <a:xfrm>
-            <a:off x="768096" y="3236976"/>
-            <a:ext cx="10652760" cy="219456"/>
+          <p:cNvPr id="15" name="Text 12"/>
+          <p:cNvSpPr/>
+          <p:nvPr/>
+        </p:nvSpPr>
+        <p:spPr>
+          <a:xfrm>
+            <a:off x="6547104" y="3236976"/>
+            <a:ext cx="4873752" cy="219456"/>
           </a:xfrm>
           <a:prstGeom prst="rect">
             <a:avLst/>
@@ -2910,14 +2934,14 @@
       </p:sp>
       <p:sp>
         <p:nvSpPr>
-          <p:cNvPr id="15" name="Text 13"/>
-          <p:cNvSpPr/>
-          <p:nvPr/>
-        </p:nvSpPr>
-        <p:spPr>
-          <a:xfrm>
-            <a:off x="768096" y="3511296"/>
-            <a:ext cx="10652760" cy="365760"/>
+          <p:cNvPr id="16" name="Text 13"/>
+          <p:cNvSpPr/>
+          <p:nvPr/>
+        </p:nvSpPr>
+        <p:spPr>
+          <a:xfrm>
+            <a:off x="6547104" y="3511296"/>
+            <a:ext cx="4873752" cy="320040"/>
           </a:xfrm>
           <a:prstGeom prst="rect">
             <a:avLst/>
@@ -2931,12 +2955,12 @@
           <a:p>
             <a:pPr indent="0" marL="0">
               <a:lnSpc>
-                <a:spcPts val="2890"/>
+                <a:spcPts val="2720"/>
               </a:lnSpc>
               <a:buNone/>
             </a:pPr>
             <a:r>
-              <a:rPr lang="en-US" sz="1700" b="1" dirty="0">
+              <a:rPr lang="en-US" sz="1600" b="1" dirty="0">
                 <a:solidFill>
                   <a:srgbClr val="E8EAED"/>
                 </a:solidFill>
@@ -2946,24 +2970,24 @@
               </a:rPr>
               <a:t>[책] 1 ───── N [독서 기록]</a:t>
             </a:r>
-            <a:endParaRPr lang="en-US" sz="1700" dirty="0"/>
-          </a:p>
-        </p:txBody>
-      </p:sp>
-      <p:sp>
-        <p:nvSpPr>
-          <p:cNvPr id="16" name="Shape 14"/>
-          <p:cNvSpPr/>
-          <p:nvPr/>
-        </p:nvSpPr>
-        <p:spPr>
-          <a:xfrm>
-            <a:off x="530352" y="4206240"/>
-            <a:ext cx="5349240" cy="1371600"/>
+            <a:endParaRPr lang="en-US" sz="1600" dirty="0"/>
+          </a:p>
+        </p:txBody>
+      </p:sp>
+      <p:sp>
+        <p:nvSpPr>
+          <p:cNvPr id="17" name="Shape 14"/>
+          <p:cNvSpPr/>
+          <p:nvPr/>
+        </p:nvSpPr>
+        <p:spPr>
+          <a:xfrm>
+            <a:off x="6309360" y="4114800"/>
+            <a:ext cx="5349240" cy="713232"/>
           </a:xfrm>
           <a:prstGeom prst="roundRect">
             <a:avLst>
-              <a:gd name="adj" fmla="val 3667"/>
+              <a:gd name="adj" fmla="val 7051"/>
             </a:avLst>
           </a:prstGeom>
           <a:solidFill>
@@ -2979,53 +3003,14 @@
       </p:sp>
       <p:sp>
         <p:nvSpPr>
-          <p:cNvPr id="17" name="Text 15"/>
-          <p:cNvSpPr/>
-          <p:nvPr/>
-        </p:nvSpPr>
-        <p:spPr>
-          <a:xfrm>
-            <a:off x="713232" y="4370832"/>
+          <p:cNvPr id="18" name="Text 15"/>
+          <p:cNvSpPr/>
+          <p:nvPr/>
+        </p:nvSpPr>
+        <p:spPr>
+          <a:xfrm>
+            <a:off x="6492240" y="4279392"/>
             <a:ext cx="4983480" cy="402336"/>
-          </a:xfrm>
-          <a:prstGeom prst="rect">
-            <a:avLst/>
-          </a:prstGeom>
-          <a:noFill/>
-          <a:ln/>
-        </p:spPr>
-        <p:txBody>
-          <a:bodyPr wrap="square" lIns="0" tIns="0" rIns="0" bIns="0" rtlCol="0" anchor="ctr"/>
-          <a:lstStyle/>
-          <a:p>
-            <a:pPr indent="0" marL="0">
-              <a:buNone/>
-            </a:pPr>
-            <a:r>
-              <a:rPr lang="en-US" sz="1650" b="1" dirty="0">
-                <a:solidFill>
-                  <a:srgbClr val="1B1D21"/>
-                </a:solidFill>
-                <a:latin typeface="IBM Plex Sans KR" pitchFamily="34" charset="0"/>
-                <a:ea typeface="IBM Plex Sans KR" pitchFamily="34" charset="-122"/>
-                <a:cs typeface="IBM Plex Sans KR" pitchFamily="34" charset="-120"/>
-              </a:rPr>
-              <a:t>기본키</a:t>
-            </a:r>
-            <a:endParaRPr lang="en-US" sz="1650" dirty="0"/>
-          </a:p>
-        </p:txBody>
-      </p:sp>
-      <p:sp>
-        <p:nvSpPr>
-          <p:cNvPr id="18" name="Text 16"/>
-          <p:cNvSpPr/>
-          <p:nvPr/>
-        </p:nvSpPr>
-        <p:spPr>
-          <a:xfrm>
-            <a:off x="713232" y="4864608"/>
-            <a:ext cx="4983480" cy="566928"/>
           </a:xfrm>
           <a:prstGeom prst="rect">
             <a:avLst/>
@@ -3044,7 +3029,7 @@
               <a:buNone/>
             </a:pPr>
             <a:r>
-              <a:rPr lang="en-US" sz="1300" dirty="0">
+              <a:rPr lang="en-US" sz="1250" dirty="0">
                 <a:solidFill>
                   <a:srgbClr val="6C7078"/>
                 </a:solidFill>
@@ -3052,26 +3037,26 @@
                 <a:ea typeface="IBM Plex Sans KR" pitchFamily="34" charset="-122"/>
                 <a:cs typeface="IBM Plex Sans KR" pitchFamily="34" charset="-120"/>
               </a:rPr>
-              <a:t>자기 표 안에서 행을 구별한다</a:t>
-            </a:r>
-            <a:endParaRPr lang="en-US" sz="1300" dirty="0"/>
-          </a:p>
-        </p:txBody>
-      </p:sp>
-      <p:sp>
-        <p:nvSpPr>
-          <p:cNvPr id="19" name="Shape 17"/>
-          <p:cNvSpPr/>
-          <p:nvPr/>
-        </p:nvSpPr>
-        <p:spPr>
-          <a:xfrm>
-            <a:off x="6309360" y="4206240"/>
-            <a:ext cx="5349240" cy="1371600"/>
+              <a:t>기본키 — 자기 표 안에서 행을 구별한다</a:t>
+            </a:r>
+            <a:endParaRPr lang="en-US" sz="1250" dirty="0"/>
+          </a:p>
+        </p:txBody>
+      </p:sp>
+      <p:sp>
+        <p:nvSpPr>
+          <p:cNvPr id="19" name="Shape 16"/>
+          <p:cNvSpPr/>
+          <p:nvPr/>
+        </p:nvSpPr>
+        <p:spPr>
+          <a:xfrm>
+            <a:off x="6309360" y="4937760"/>
+            <a:ext cx="5349240" cy="640080"/>
           </a:xfrm>
           <a:prstGeom prst="roundRect">
             <a:avLst>
-              <a:gd name="adj" fmla="val 3667"/>
+              <a:gd name="adj" fmla="val 7857"/>
             </a:avLst>
           </a:prstGeom>
           <a:solidFill>
@@ -3087,53 +3072,14 @@
       </p:sp>
       <p:sp>
         <p:nvSpPr>
-          <p:cNvPr id="20" name="Text 18"/>
-          <p:cNvSpPr/>
-          <p:nvPr/>
-        </p:nvSpPr>
-        <p:spPr>
-          <a:xfrm>
-            <a:off x="6492240" y="4370832"/>
-            <a:ext cx="4983480" cy="402336"/>
-          </a:xfrm>
-          <a:prstGeom prst="rect">
-            <a:avLst/>
-          </a:prstGeom>
-          <a:noFill/>
-          <a:ln/>
-        </p:spPr>
-        <p:txBody>
-          <a:bodyPr wrap="square" lIns="0" tIns="0" rIns="0" bIns="0" rtlCol="0" anchor="ctr"/>
-          <a:lstStyle/>
-          <a:p>
-            <a:pPr indent="0" marL="0">
-              <a:buNone/>
-            </a:pPr>
-            <a:r>
-              <a:rPr lang="en-US" sz="1650" b="1" dirty="0">
-                <a:solidFill>
-                  <a:srgbClr val="1B1D21"/>
-                </a:solidFill>
-                <a:latin typeface="IBM Plex Sans KR" pitchFamily="34" charset="0"/>
-                <a:ea typeface="IBM Plex Sans KR" pitchFamily="34" charset="-122"/>
-                <a:cs typeface="IBM Plex Sans KR" pitchFamily="34" charset="-120"/>
-              </a:rPr>
-              <a:t>외래키</a:t>
-            </a:r>
-            <a:endParaRPr lang="en-US" sz="1650" dirty="0"/>
-          </a:p>
-        </p:txBody>
-      </p:sp>
-      <p:sp>
-        <p:nvSpPr>
-          <p:cNvPr id="21" name="Text 19"/>
-          <p:cNvSpPr/>
-          <p:nvPr/>
-        </p:nvSpPr>
-        <p:spPr>
-          <a:xfrm>
-            <a:off x="6492240" y="4864608"/>
-            <a:ext cx="4983480" cy="566928"/>
+          <p:cNvPr id="20" name="Text 17"/>
+          <p:cNvSpPr/>
+          <p:nvPr/>
+        </p:nvSpPr>
+        <p:spPr>
+          <a:xfrm>
+            <a:off x="6492240" y="5102352"/>
+            <a:ext cx="4983480" cy="329184"/>
           </a:xfrm>
           <a:prstGeom prst="rect">
             <a:avLst/>
@@ -3152,7 +3098,7 @@
               <a:buNone/>
             </a:pPr>
             <a:r>
-              <a:rPr lang="en-US" sz="1300" dirty="0">
+              <a:rPr lang="en-US" sz="1250" dirty="0">
                 <a:solidFill>
                   <a:srgbClr val="34373D"/>
                 </a:solidFill>
@@ -3160,15 +3106,15 @@
                 <a:ea typeface="IBM Plex Sans KR" pitchFamily="34" charset="-122"/>
                 <a:cs typeface="IBM Plex Sans KR" pitchFamily="34" charset="-120"/>
               </a:rPr>
-              <a:t>다른 표의 행을 가리킨다 — 방향이 반대다</a:t>
-            </a:r>
-            <a:endParaRPr lang="en-US" sz="1300" dirty="0"/>
-          </a:p>
-        </p:txBody>
-      </p:sp>
-      <p:sp>
-        <p:nvSpPr>
-          <p:cNvPr id="22" name="Shape 20"/>
+              <a:t>외래키 — 다른 표의 행을 가리킨다</a:t>
+            </a:r>
+            <a:endParaRPr lang="en-US" sz="1250" dirty="0"/>
+          </a:p>
+        </p:txBody>
+      </p:sp>
+      <p:sp>
+        <p:nvSpPr>
+          <p:cNvPr id="21" name="Shape 18"/>
           <p:cNvSpPr/>
           <p:nvPr/>
         </p:nvSpPr>
@@ -3195,7 +3141,7 @@
       </p:sp>
       <p:sp>
         <p:nvSpPr>
-          <p:cNvPr id="23" name="Text 21"/>
+          <p:cNvPr id="22" name="Text 19"/>
           <p:cNvSpPr/>
           <p:nvPr/>
         </p:nvSpPr>

--- a/07/ppt/07-1_관계형_데이터베이스의_기초_v1.pptx
+++ b/07/ppt/07-1_관계형_데이터베이스의_기초_v1.pptx
@@ -12302,7 +12302,7 @@
                 <a:ea typeface="IBM Plex Sans KR" pitchFamily="34" charset="-122"/>
                 <a:cs typeface="IBM Plex Sans KR" pitchFamily="34" charset="-120"/>
               </a:rPr>
-              <a:t>이 수업에서는 id 가 자동으로 붙는다. 학생이 정할 것이 없다.</a:t>
+              <a:t>이 수업에서는 id 가 자동으로 붙는다. 내가 정할 것이 없다.</a:t>
             </a:r>
             <a:endParaRPr lang="en-US" sz="1500" dirty="0"/>
           </a:p>
